--- a/00_InfoEducatie_2026/Liftrix_InfoEducatie_2026.pptx
+++ b/00_InfoEducatie_2026/Liftrix_InfoEducatie_2026.pptx
@@ -1949,7 +1949,10 @@
           <a:bodyPr/>
           <a:lstStyle/>
           <a:p>
-            <a:endParaRPr lang="en-US"/>
+            <a:r>
+              <a:rPr lang="en-US" dirty="0"/>
+              <a:t>22</a:t>
+            </a:r>
           </a:p>
         </p:txBody>
       </p:sp>
@@ -2030,9 +2033,6 @@
             <a:endParaRPr lang="en-US" sz="1700" dirty="0"/>
           </a:p>
           <a:p>
-            <a:pPr marL="0" indent="0" algn="l">
-              <a:buNone/>
-            </a:pPr>
             <a:r>
               <a:rPr lang="en-US" sz="1700" dirty="0">
                 <a:solidFill>
@@ -2042,7 +2042,40 @@
                 <a:ea typeface="Calibri" pitchFamily="34" charset="-122"/>
                 <a:cs typeface="Calibri" pitchFamily="34" charset="-120"/>
               </a:rPr>
-              <a:t>coaching AI și engagement social</a:t>
+              <a:t>coaching AI </a:t>
+            </a:r>
+            <a:r>
+              <a:rPr lang="en-US" sz="1700" dirty="0" err="1">
+                <a:solidFill>
+                  <a:srgbClr val="B2F5EF"/>
+                </a:solidFill>
+                <a:latin typeface="Calibri" pitchFamily="34" charset="0"/>
+                <a:ea typeface="Calibri" pitchFamily="34" charset="-122"/>
+                <a:cs typeface="Calibri" pitchFamily="34" charset="-120"/>
+              </a:rPr>
+              <a:t>și</a:t>
+            </a:r>
+            <a:r>
+              <a:rPr lang="en-US" sz="1700" dirty="0">
+                <a:solidFill>
+                  <a:srgbClr val="B2F5EF"/>
+                </a:solidFill>
+                <a:latin typeface="Calibri" pitchFamily="34" charset="0"/>
+                <a:ea typeface="Calibri" pitchFamily="34" charset="-122"/>
+                <a:cs typeface="Calibri" pitchFamily="34" charset="-120"/>
+              </a:rPr>
+              <a:t> </a:t>
+            </a:r>
+            <a:r>
+              <a:rPr lang="en-US" sz="1700" dirty="0" err="1">
+                <a:solidFill>
+                  <a:srgbClr val="B2F5EF"/>
+                </a:solidFill>
+                <a:latin typeface="Calibri" pitchFamily="34" charset="0"/>
+                <a:ea typeface="Calibri" pitchFamily="34" charset="-122"/>
+                <a:cs typeface="Calibri" pitchFamily="34" charset="-120"/>
+              </a:rPr>
+              <a:t>comunități</a:t>
             </a:r>
             <a:endParaRPr lang="en-US" sz="1700" dirty="0"/>
           </a:p>
@@ -2160,14 +2193,14 @@
       </p:sp>
       <p:sp>
         <p:nvSpPr>
-          <p:cNvPr id="10" name="Text 8"/>
-          <p:cNvSpPr/>
-          <p:nvPr/>
-        </p:nvSpPr>
-        <p:spPr>
-          <a:xfrm>
-            <a:off x="2514600" y="2697480"/>
-            <a:ext cx="2011680" cy="640080"/>
+          <p:cNvPr id="14" name="Text 12"/>
+          <p:cNvSpPr/>
+          <p:nvPr/>
+        </p:nvSpPr>
+        <p:spPr>
+          <a:xfrm>
+            <a:off x="2308293" y="2745921"/>
+            <a:ext cx="994128" cy="640080"/>
           </a:xfrm>
           <a:prstGeom prst="rect">
             <a:avLst/>
@@ -2191,76 +2224,15 @@
                 <a:ea typeface="Calibri" pitchFamily="34" charset="-122"/>
                 <a:cs typeface="Calibri" pitchFamily="34" charset="-120"/>
               </a:rPr>
-              <a:t>84</a:t>
+              <a:t>Clean</a:t>
             </a:r>
             <a:endParaRPr lang="en-US" sz="2800" dirty="0"/>
           </a:p>
-        </p:txBody>
-      </p:sp>
-      <p:sp>
-        <p:nvSpPr>
-          <p:cNvPr id="11" name="Text 9"/>
-          <p:cNvSpPr/>
-          <p:nvPr/>
-        </p:nvSpPr>
-        <p:spPr>
-          <a:xfrm>
-            <a:off x="2514600" y="3310128"/>
-            <a:ext cx="2011680" cy="320040"/>
-          </a:xfrm>
-          <a:prstGeom prst="rect">
-            <a:avLst/>
-          </a:prstGeom>
-          <a:noFill/>
-          <a:ln/>
-        </p:spPr>
-        <p:txBody>
-          <a:bodyPr wrap="square" lIns="0" tIns="0" rIns="0" bIns="0" rtlCol="0" anchor="ctr"/>
-          <a:lstStyle/>
           <a:p>
             <a:pPr marL="0" indent="0" algn="l">
               <a:buNone/>
             </a:pPr>
             <a:r>
-              <a:rPr lang="en-US" sz="1100" dirty="0">
-                <a:solidFill>
-                  <a:srgbClr val="9CA3AF"/>
-                </a:solidFill>
-                <a:latin typeface="Calibri" pitchFamily="34" charset="0"/>
-                <a:ea typeface="Calibri" pitchFamily="34" charset="-122"/>
-                <a:cs typeface="Calibri" pitchFamily="34" charset="-120"/>
-              </a:rPr>
-              <a:t>Use Cases</a:t>
-            </a:r>
-            <a:endParaRPr lang="en-US" sz="1100" dirty="0"/>
-          </a:p>
-        </p:txBody>
-      </p:sp>
-      <p:sp>
-        <p:nvSpPr>
-          <p:cNvPr id="12" name="Text 10"/>
-          <p:cNvSpPr/>
-          <p:nvPr/>
-        </p:nvSpPr>
-        <p:spPr>
-          <a:xfrm>
-            <a:off x="4663440" y="2697480"/>
-            <a:ext cx="2011680" cy="640080"/>
-          </a:xfrm>
-          <a:prstGeom prst="rect">
-            <a:avLst/>
-          </a:prstGeom>
-          <a:noFill/>
-          <a:ln/>
-        </p:spPr>
-        <p:txBody>
-          <a:bodyPr wrap="square" lIns="0" tIns="0" rIns="0" bIns="0" rtlCol="0" anchor="ctr"/>
-          <a:lstStyle/>
-          <a:p>
-            <a:pPr marL="0" indent="0" algn="l">
-              <a:buNone/>
-            </a:pPr>
-            <a:r>
               <a:rPr lang="en-US" sz="2800" b="1" dirty="0">
                 <a:solidFill>
                   <a:srgbClr val="20C9B7"/>
@@ -2269,7 +2241,7 @@
                 <a:ea typeface="Calibri" pitchFamily="34" charset="-122"/>
                 <a:cs typeface="Calibri" pitchFamily="34" charset="-120"/>
               </a:rPr>
-              <a:t>69</a:t>
+              <a:t>Arch.</a:t>
             </a:r>
             <a:endParaRPr lang="en-US" sz="2800" dirty="0"/>
           </a:p>
@@ -2277,108 +2249,13 @@
       </p:sp>
       <p:sp>
         <p:nvSpPr>
-          <p:cNvPr id="13" name="Text 11"/>
-          <p:cNvSpPr/>
-          <p:nvPr/>
-        </p:nvSpPr>
-        <p:spPr>
-          <a:xfrm>
-            <a:off x="4663440" y="3310128"/>
-            <a:ext cx="2011680" cy="320040"/>
-          </a:xfrm>
-          <a:prstGeom prst="rect">
-            <a:avLst/>
-          </a:prstGeom>
-          <a:noFill/>
-          <a:ln/>
-        </p:spPr>
-        <p:txBody>
-          <a:bodyPr wrap="square" lIns="0" tIns="0" rIns="0" bIns="0" rtlCol="0" anchor="ctr"/>
-          <a:lstStyle/>
-          <a:p>
-            <a:pPr marL="0" indent="0" algn="l">
-              <a:buNone/>
-            </a:pPr>
-            <a:r>
-              <a:rPr lang="en-US" sz="1100" dirty="0">
-                <a:solidFill>
-                  <a:srgbClr val="9CA3AF"/>
-                </a:solidFill>
-                <a:latin typeface="Calibri" pitchFamily="34" charset="0"/>
-                <a:ea typeface="Calibri" pitchFamily="34" charset="-122"/>
-                <a:cs typeface="Calibri" pitchFamily="34" charset="-120"/>
-              </a:rPr>
-              <a:t>Entități Room</a:t>
-            </a:r>
-            <a:endParaRPr lang="en-US" sz="1100" dirty="0"/>
-          </a:p>
-        </p:txBody>
-      </p:sp>
-      <p:sp>
-        <p:nvSpPr>
-          <p:cNvPr id="14" name="Text 12"/>
-          <p:cNvSpPr/>
-          <p:nvPr/>
-        </p:nvSpPr>
-        <p:spPr>
-          <a:xfrm>
-            <a:off x="6812280" y="2697480"/>
-            <a:ext cx="2011680" cy="640080"/>
-          </a:xfrm>
-          <a:prstGeom prst="rect">
-            <a:avLst/>
-          </a:prstGeom>
-          <a:noFill/>
-          <a:ln/>
-        </p:spPr>
-        <p:txBody>
-          <a:bodyPr wrap="square" lIns="0" tIns="0" rIns="0" bIns="0" rtlCol="0" anchor="ctr"/>
-          <a:lstStyle/>
-          <a:p>
-            <a:pPr marL="0" indent="0" algn="l">
-              <a:buNone/>
-            </a:pPr>
-            <a:r>
-              <a:rPr lang="en-US" sz="2800" b="1" dirty="0">
-                <a:solidFill>
-                  <a:srgbClr val="20C9B7"/>
-                </a:solidFill>
-                <a:latin typeface="Calibri" pitchFamily="34" charset="0"/>
-                <a:ea typeface="Calibri" pitchFamily="34" charset="-122"/>
-                <a:cs typeface="Calibri" pitchFamily="34" charset="-120"/>
-              </a:rPr>
-              <a:t>Clean</a:t>
-            </a:r>
-            <a:endParaRPr lang="en-US" sz="2800" dirty="0"/>
-          </a:p>
-          <a:p>
-            <a:pPr marL="0" indent="0" algn="l">
-              <a:buNone/>
-            </a:pPr>
-            <a:r>
-              <a:rPr lang="en-US" sz="2800" b="1" dirty="0">
-                <a:solidFill>
-                  <a:srgbClr val="20C9B7"/>
-                </a:solidFill>
-                <a:latin typeface="Calibri" pitchFamily="34" charset="0"/>
-                <a:ea typeface="Calibri" pitchFamily="34" charset="-122"/>
-                <a:cs typeface="Calibri" pitchFamily="34" charset="-120"/>
-              </a:rPr>
-              <a:t>Arch.</a:t>
-            </a:r>
-            <a:endParaRPr lang="en-US" sz="2800" dirty="0"/>
-          </a:p>
-        </p:txBody>
-      </p:sp>
-      <p:sp>
-        <p:nvSpPr>
           <p:cNvPr id="15" name="Text 13"/>
           <p:cNvSpPr/>
           <p:nvPr/>
         </p:nvSpPr>
         <p:spPr>
           <a:xfrm>
-            <a:off x="6812280" y="3310128"/>
+            <a:off x="2308293" y="3358569"/>
             <a:ext cx="2011680" cy="320040"/>
           </a:xfrm>
           <a:prstGeom prst="rect">
@@ -2475,7 +2352,7 @@
                 <a:ea typeface="Calibri" pitchFamily="34" charset="-122"/>
                 <a:cs typeface="Calibri" pitchFamily="34" charset="-120"/>
               </a:rPr>
-              <a:t>|  Android · Kotlin · Jetpack Compose</a:t>
+              <a:t> |  Android · Kotlin · Jetpack Compose</a:t>
             </a:r>
             <a:endParaRPr lang="en-US" sz="1000" dirty="0"/>
           </a:p>
@@ -4041,7 +3918,7 @@
                   </a:schemeClr>
                 </a:solidFill>
               </a:rPr>
-              <a:t> la 1RM — n-am </a:t>
+              <a:t> la 1RM, n-am </a:t>
             </a:r>
             <a:r>
               <a:rPr lang="en-US" sz="1000" dirty="0" err="1">
@@ -4301,25 +4178,8 @@
                   </a:schemeClr>
                 </a:solidFill>
               </a:rPr>
-              <a:t> rest </a:t>
-            </a:r>
-            <a:r>
-              <a:rPr lang="en-US" sz="1000">
-                <a:solidFill>
-                  <a:schemeClr val="bg2">
-                    <a:lumMod val="50000"/>
-                  </a:schemeClr>
-                </a:solidFill>
-              </a:rPr>
-              <a:t>e solid.</a:t>
-            </a:r>
-            <a:endParaRPr lang="en-US" sz="1000" dirty="0">
-              <a:solidFill>
-                <a:schemeClr val="bg2">
-                  <a:lumMod val="50000"/>
-                </a:schemeClr>
-              </a:solidFill>
-            </a:endParaRPr>
+              <a:t> rest e solid.</a:t>
+            </a:r>
           </a:p>
         </p:txBody>
       </p:sp>
@@ -8192,7 +8052,7 @@
                 <a:ea typeface="Calibri" pitchFamily="34" charset="-122"/>
                 <a:cs typeface="Calibri" pitchFamily="34" charset="-120"/>
               </a:rPr>
-              <a:t>🤖 Unde a intervenit AI-ul</a:t>
+              <a:t> Unde a intervenit AI-ul</a:t>
             </a:r>
             <a:endParaRPr lang="en-US" sz="1200" dirty="0"/>
           </a:p>
@@ -8336,9 +8196,6 @@
           <a:bodyPr wrap="square" lIns="0" tIns="0" rIns="0" bIns="0" rtlCol="0" anchor="ctr"/>
           <a:lstStyle/>
           <a:p>
-            <a:pPr marL="0" indent="0">
-              <a:buNone/>
-            </a:pPr>
             <a:r>
               <a:rPr lang="en-US" sz="900" b="1" dirty="0">
                 <a:solidFill>
@@ -8348,7 +8205,18 @@
                 <a:ea typeface="Calibri" pitchFamily="34" charset="-122"/>
                 <a:cs typeface="Calibri" pitchFamily="34" charset="-120"/>
               </a:rPr>
-              <a:t>🟠 Semnificativ</a:t>
+              <a:t>🟡 </a:t>
+            </a:r>
+            <a:r>
+              <a:rPr lang="en-US" sz="900" b="1" dirty="0" err="1">
+                <a:solidFill>
+                  <a:srgbClr val="FFFFFF"/>
+                </a:solidFill>
+                <a:latin typeface="Calibri" pitchFamily="34" charset="0"/>
+                <a:ea typeface="Calibri" pitchFamily="34" charset="-122"/>
+                <a:cs typeface="Calibri" pitchFamily="34" charset="-120"/>
+              </a:rPr>
+              <a:t>Asistență</a:t>
             </a:r>
             <a:endParaRPr lang="en-US" sz="900" dirty="0"/>
           </a:p>
